--- a/docs/content/mapping/mapping_activity.pptx
+++ b/docs/content/mapping/mapping_activity.pptx
@@ -27,6 +27,7 @@
     <p:sldId id="275" r:id="rId21"/>
     <p:sldId id="276" r:id="rId22"/>
     <p:sldId id="277" r:id="rId23"/>
+    <p:sldId id="278" r:id="rId24"/>
   </p:sldIdLst>
   <p:sldSz cx="9144000" cy="5143500" type="screen16x9"/>
   <p:notesSz cx="6858000" cy="9144000"/>
@@ -3300,7 +3301,7 @@
             </a:pPr>
             <a:r>
               <a:rPr/>
-              <a:t>Worksheet 13 — Mapping Bigfoot Sightings</a:t>
+              <a:t>Worksheet — Mapping Bigfoot Sightings</a:t>
             </a:r>
           </a:p>
         </p:txBody>
@@ -8363,7 +8364,7 @@
             </a:pPr>
             <a:r>
               <a:rPr/>
-              <a:t>Getting unstuck</a:t>
+              <a:t>Extension — out of class (~30–40 min)</a:t>
             </a:r>
           </a:p>
         </p:txBody>
@@ -8383,32 +8384,1157 @@
           <a:bodyPr/>
           <a:lstStyle/>
           <a:p>
+            <a:pPr lvl="0" indent="0" marL="0">
+              <a:buNone/>
+            </a:pPr>
+            <a:r>
+              <a:rPr i="1"/>
+              <a:t>Turn this in with your worksheet. In class you mapped Bigfoot reports. Now you map a </a:t>
+            </a:r>
+            <a:r>
+              <a:rPr b="1" i="1"/>
+              <a:t>real species you pick</a:t>
+            </a:r>
+            <a:r>
+              <a:rPr i="1"/>
+              <a:t>, pulled live from GBIF with </a:t>
+            </a:r>
+            <a:r>
+              <a:rPr i="1">
+                <a:latin typeface="Courier"/>
+              </a:rPr>
+              <a:t>rgbif</a:t>
+            </a:r>
+            <a:r>
+              <a:rPr i="1"/>
+              <a:t>.</a:t>
+            </a:r>
+          </a:p>
+          <a:p>
+            <a:pPr lvl="0" indent="0" marL="1270000">
+              <a:buNone/>
+            </a:pPr>
+            <a:r>
+              <a:rPr sz="2000" b="1"/>
+              <a:t>Important</a:t>
+            </a:r>
+          </a:p>
+          <a:p>
+            <a:pPr lvl="0" indent="0" marL="1270000">
+              <a:buNone/>
+            </a:pPr>
+            <a:r>
+              <a:rPr sz="2000" b="1"/>
+              <a:t>E2 and E3 must be handwritten</a:t>
+            </a:r>
+            <a:r>
+              <a:rPr sz="2000"/>
+              <a:t> on paper, photographed, and embedded (</a:t>
+            </a:r>
+            <a:r>
+              <a:rPr sz="2000">
+                <a:latin typeface="Courier"/>
+              </a:rPr>
+              <a:t>![caption](my_photo.jpg)</a:t>
+            </a:r>
+            <a:r>
+              <a:rPr sz="2000"/>
+              <a:t>). Typed answers get </a:t>
+            </a:r>
+            <a:r>
+              <a:rPr sz="2000" b="1"/>
+              <a:t>at most half credit, even if correct</a:t>
+            </a:r>
+            <a:r>
+              <a:rPr sz="2000"/>
+              <a:t> — E2 is your prediction </a:t>
+            </a:r>
+            <a:r>
+              <a:rPr sz="2000" i="1"/>
+              <a:t>before</a:t>
+            </a:r>
+            <a:r>
+              <a:rPr sz="2000"/>
+              <a:t> you download.</a:t>
+            </a:r>
+          </a:p>
+          <a:p>
+            <a:pPr lvl="0" indent="0" marL="0">
+              <a:spcBef>
+                <a:spcPts val="3000"/>
+              </a:spcBef>
+              <a:buNone/>
+            </a:pPr>
+            <a:r>
+              <a:rPr b="1"/>
+              <a:t>E1 · Map your own species (4 pts)</a:t>
+            </a:r>
+          </a:p>
+          <a:p>
+            <a:pPr lvl="0" indent="0" marL="0">
+              <a:buNone/>
+            </a:pPr>
+            <a:r>
+              <a:rPr/>
+              <a:t>Pick any species with a scientific name (a plant, bird, mammal, insect — your choice). Then, with the same recipe as class:</a:t>
+            </a:r>
+          </a:p>
+          <a:p>
+            <a:pPr lvl="0" indent="0">
+              <a:buNone/>
+            </a:pPr>
+            <a:r>
+              <a:rPr>
+                <a:solidFill>
+                  <a:srgbClr val="4758AB"/>
+                </a:solidFill>
+                <a:latin typeface="Courier"/>
+              </a:rPr>
+              <a:t>library</a:t>
+            </a:r>
+            <a:r>
+              <a:rPr>
+                <a:solidFill>
+                  <a:srgbClr val="003B4F"/>
+                </a:solidFill>
+                <a:latin typeface="Courier"/>
+              </a:rPr>
+              <a:t>(rgbif)</a:t>
+            </a:r>
+            <a:br/>
+            <a:r>
+              <a:rPr>
+                <a:solidFill>
+                  <a:srgbClr val="4758AB"/>
+                </a:solidFill>
+                <a:latin typeface="Courier"/>
+              </a:rPr>
+              <a:t>library</a:t>
+            </a:r>
+            <a:r>
+              <a:rPr>
+                <a:solidFill>
+                  <a:srgbClr val="003B4F"/>
+                </a:solidFill>
+                <a:latin typeface="Courier"/>
+              </a:rPr>
+              <a:t>(sf)</a:t>
+            </a:r>
+            <a:br/>
+            <a:r>
+              <a:rPr>
+                <a:solidFill>
+                  <a:srgbClr val="4758AB"/>
+                </a:solidFill>
+                <a:latin typeface="Courier"/>
+              </a:rPr>
+              <a:t>library</a:t>
+            </a:r>
+            <a:r>
+              <a:rPr>
+                <a:solidFill>
+                  <a:srgbClr val="003B4F"/>
+                </a:solidFill>
+                <a:latin typeface="Courier"/>
+              </a:rPr>
+              <a:t>(tidyverse)</a:t>
+            </a:r>
+            <a:br/>
+            <a:br/>
+            <a:r>
+              <a:rPr>
+                <a:solidFill>
+                  <a:srgbClr val="5E5E5E"/>
+                </a:solidFill>
+                <a:latin typeface="Courier"/>
+              </a:rPr>
+              <a:t># 1. up to ~1500 US records that have coordinates</a:t>
+            </a:r>
+            <a:br/>
+            <a:r>
+              <a:rPr>
+                <a:solidFill>
+                  <a:srgbClr val="003B4F"/>
+                </a:solidFill>
+                <a:latin typeface="Courier"/>
+              </a:rPr>
+              <a:t>occ &lt;- </a:t>
+            </a:r>
+            <a:r>
+              <a:rPr>
+                <a:solidFill>
+                  <a:srgbClr val="4758AB"/>
+                </a:solidFill>
+                <a:latin typeface="Courier"/>
+              </a:rPr>
+              <a:t>occ_data</a:t>
+            </a:r>
+            <a:r>
+              <a:rPr>
+                <a:solidFill>
+                  <a:srgbClr val="003B4F"/>
+                </a:solidFill>
+                <a:latin typeface="Courier"/>
+              </a:rPr>
+              <a:t>(</a:t>
+            </a:r>
+            <a:r>
+              <a:rPr>
+                <a:solidFill>
+                  <a:srgbClr val="657422"/>
+                </a:solidFill>
+                <a:latin typeface="Courier"/>
+              </a:rPr>
+              <a:t>scientificName =</a:t>
+            </a:r>
+            <a:r>
+              <a:rPr>
+                <a:solidFill>
+                  <a:srgbClr val="003B4F"/>
+                </a:solidFill>
+                <a:latin typeface="Courier"/>
+              </a:rPr>
+              <a:t> </a:t>
+            </a:r>
+            <a:r>
+              <a:rPr>
+                <a:solidFill>
+                  <a:srgbClr val="20794D"/>
+                </a:solidFill>
+                <a:latin typeface="Courier"/>
+              </a:rPr>
+              <a:t>"Genus species"</a:t>
+            </a:r>
+            <a:r>
+              <a:rPr>
+                <a:solidFill>
+                  <a:srgbClr val="003B4F"/>
+                </a:solidFill>
+                <a:latin typeface="Courier"/>
+              </a:rPr>
+              <a:t>,</a:t>
+            </a:r>
+            <a:br/>
+            <a:r>
+              <a:rPr>
+                <a:solidFill>
+                  <a:srgbClr val="003B4F"/>
+                </a:solidFill>
+                <a:latin typeface="Courier"/>
+              </a:rPr>
+              <a:t>                </a:t>
+            </a:r>
+            <a:r>
+              <a:rPr>
+                <a:solidFill>
+                  <a:srgbClr val="657422"/>
+                </a:solidFill>
+                <a:latin typeface="Courier"/>
+              </a:rPr>
+              <a:t>country =</a:t>
+            </a:r>
+            <a:r>
+              <a:rPr>
+                <a:solidFill>
+                  <a:srgbClr val="003B4F"/>
+                </a:solidFill>
+                <a:latin typeface="Courier"/>
+              </a:rPr>
+              <a:t> </a:t>
+            </a:r>
+            <a:r>
+              <a:rPr>
+                <a:solidFill>
+                  <a:srgbClr val="20794D"/>
+                </a:solidFill>
+                <a:latin typeface="Courier"/>
+              </a:rPr>
+              <a:t>"US"</a:t>
+            </a:r>
+            <a:r>
+              <a:rPr>
+                <a:solidFill>
+                  <a:srgbClr val="003B4F"/>
+                </a:solidFill>
+                <a:latin typeface="Courier"/>
+              </a:rPr>
+              <a:t>, </a:t>
+            </a:r>
+            <a:r>
+              <a:rPr>
+                <a:solidFill>
+                  <a:srgbClr val="657422"/>
+                </a:solidFill>
+                <a:latin typeface="Courier"/>
+              </a:rPr>
+              <a:t>hasCoordinate =</a:t>
+            </a:r>
+            <a:r>
+              <a:rPr>
+                <a:solidFill>
+                  <a:srgbClr val="003B4F"/>
+                </a:solidFill>
+                <a:latin typeface="Courier"/>
+              </a:rPr>
+              <a:t> </a:t>
+            </a:r>
+            <a:r>
+              <a:rPr>
+                <a:solidFill>
+                  <a:srgbClr val="8F5902"/>
+                </a:solidFill>
+                <a:latin typeface="Courier"/>
+              </a:rPr>
+              <a:t>TRUE</a:t>
+            </a:r>
+            <a:r>
+              <a:rPr>
+                <a:solidFill>
+                  <a:srgbClr val="003B4F"/>
+                </a:solidFill>
+                <a:latin typeface="Courier"/>
+              </a:rPr>
+              <a:t>, </a:t>
+            </a:r>
+            <a:r>
+              <a:rPr>
+                <a:solidFill>
+                  <a:srgbClr val="657422"/>
+                </a:solidFill>
+                <a:latin typeface="Courier"/>
+              </a:rPr>
+              <a:t>limit =</a:t>
+            </a:r>
+            <a:r>
+              <a:rPr>
+                <a:solidFill>
+                  <a:srgbClr val="003B4F"/>
+                </a:solidFill>
+                <a:latin typeface="Courier"/>
+              </a:rPr>
+              <a:t> </a:t>
+            </a:r>
+            <a:r>
+              <a:rPr>
+                <a:solidFill>
+                  <a:srgbClr val="AD0000"/>
+                </a:solidFill>
+                <a:latin typeface="Courier"/>
+              </a:rPr>
+              <a:t>1500</a:t>
+            </a:r>
+            <a:r>
+              <a:rPr>
+                <a:solidFill>
+                  <a:srgbClr val="003B4F"/>
+                </a:solidFill>
+                <a:latin typeface="Courier"/>
+              </a:rPr>
+              <a:t>)</a:t>
+            </a:r>
+            <a:r>
+              <a:rPr>
+                <a:solidFill>
+                  <a:srgbClr val="5E5E5E"/>
+                </a:solidFill>
+                <a:latin typeface="Courier"/>
+              </a:rPr>
+              <a:t>$</a:t>
+            </a:r>
+            <a:r>
+              <a:rPr>
+                <a:solidFill>
+                  <a:srgbClr val="003B4F"/>
+                </a:solidFill>
+                <a:latin typeface="Courier"/>
+              </a:rPr>
+              <a:t>data</a:t>
+            </a:r>
+            <a:br/>
+            <a:br/>
+            <a:r>
+              <a:rPr>
+                <a:solidFill>
+                  <a:srgbClr val="5E5E5E"/>
+                </a:solidFill>
+                <a:latin typeface="Courier"/>
+              </a:rPr>
+              <a:t># 2. keep real coordinates, build the sf object (x = longitude first!)</a:t>
+            </a:r>
+            <a:br/>
+            <a:r>
+              <a:rPr>
+                <a:solidFill>
+                  <a:srgbClr val="003B4F"/>
+                </a:solidFill>
+                <a:latin typeface="Courier"/>
+              </a:rPr>
+              <a:t>sp_sf &lt;- occ </a:t>
+            </a:r>
+            <a:r>
+              <a:rPr>
+                <a:solidFill>
+                  <a:srgbClr val="5E5E5E"/>
+                </a:solidFill>
+                <a:latin typeface="Courier"/>
+              </a:rPr>
+              <a:t>%&gt;%</a:t>
+            </a:r>
+            <a:br/>
+            <a:r>
+              <a:rPr>
+                <a:solidFill>
+                  <a:srgbClr val="003B4F"/>
+                </a:solidFill>
+                <a:latin typeface="Courier"/>
+              </a:rPr>
+              <a:t>  </a:t>
+            </a:r>
+            <a:r>
+              <a:rPr>
+                <a:solidFill>
+                  <a:srgbClr val="4758AB"/>
+                </a:solidFill>
+                <a:latin typeface="Courier"/>
+              </a:rPr>
+              <a:t>filter</a:t>
+            </a:r>
+            <a:r>
+              <a:rPr>
+                <a:solidFill>
+                  <a:srgbClr val="003B4F"/>
+                </a:solidFill>
+                <a:latin typeface="Courier"/>
+              </a:rPr>
+              <a:t>(</a:t>
+            </a:r>
+            <a:r>
+              <a:rPr>
+                <a:solidFill>
+                  <a:srgbClr val="5E5E5E"/>
+                </a:solidFill>
+                <a:latin typeface="Courier"/>
+              </a:rPr>
+              <a:t>!</a:t>
+            </a:r>
+            <a:r>
+              <a:rPr>
+                <a:solidFill>
+                  <a:srgbClr val="4758AB"/>
+                </a:solidFill>
+                <a:latin typeface="Courier"/>
+              </a:rPr>
+              <a:t>is.na</a:t>
+            </a:r>
+            <a:r>
+              <a:rPr>
+                <a:solidFill>
+                  <a:srgbClr val="003B4F"/>
+                </a:solidFill>
+                <a:latin typeface="Courier"/>
+              </a:rPr>
+              <a:t>(decimalLongitude), </a:t>
+            </a:r>
+            <a:r>
+              <a:rPr>
+                <a:solidFill>
+                  <a:srgbClr val="5E5E5E"/>
+                </a:solidFill>
+                <a:latin typeface="Courier"/>
+              </a:rPr>
+              <a:t>!</a:t>
+            </a:r>
+            <a:r>
+              <a:rPr>
+                <a:solidFill>
+                  <a:srgbClr val="4758AB"/>
+                </a:solidFill>
+                <a:latin typeface="Courier"/>
+              </a:rPr>
+              <a:t>is.na</a:t>
+            </a:r>
+            <a:r>
+              <a:rPr>
+                <a:solidFill>
+                  <a:srgbClr val="003B4F"/>
+                </a:solidFill>
+                <a:latin typeface="Courier"/>
+              </a:rPr>
+              <a:t>(decimalLatitude)) </a:t>
+            </a:r>
+            <a:r>
+              <a:rPr>
+                <a:solidFill>
+                  <a:srgbClr val="5E5E5E"/>
+                </a:solidFill>
+                <a:latin typeface="Courier"/>
+              </a:rPr>
+              <a:t>%&gt;%</a:t>
+            </a:r>
+            <a:br/>
+            <a:r>
+              <a:rPr>
+                <a:solidFill>
+                  <a:srgbClr val="003B4F"/>
+                </a:solidFill>
+                <a:latin typeface="Courier"/>
+              </a:rPr>
+              <a:t>  </a:t>
+            </a:r>
+            <a:r>
+              <a:rPr>
+                <a:solidFill>
+                  <a:srgbClr val="4758AB"/>
+                </a:solidFill>
+                <a:latin typeface="Courier"/>
+              </a:rPr>
+              <a:t>st_as_sf</a:t>
+            </a:r>
+            <a:r>
+              <a:rPr>
+                <a:solidFill>
+                  <a:srgbClr val="003B4F"/>
+                </a:solidFill>
+                <a:latin typeface="Courier"/>
+              </a:rPr>
+              <a:t>(</a:t>
+            </a:r>
+            <a:r>
+              <a:rPr>
+                <a:solidFill>
+                  <a:srgbClr val="657422"/>
+                </a:solidFill>
+                <a:latin typeface="Courier"/>
+              </a:rPr>
+              <a:t>coords =</a:t>
+            </a:r>
+            <a:r>
+              <a:rPr>
+                <a:solidFill>
+                  <a:srgbClr val="003B4F"/>
+                </a:solidFill>
+                <a:latin typeface="Courier"/>
+              </a:rPr>
+              <a:t> </a:t>
+            </a:r>
+            <a:r>
+              <a:rPr>
+                <a:solidFill>
+                  <a:srgbClr val="4758AB"/>
+                </a:solidFill>
+                <a:latin typeface="Courier"/>
+              </a:rPr>
+              <a:t>c</a:t>
+            </a:r>
+            <a:r>
+              <a:rPr>
+                <a:solidFill>
+                  <a:srgbClr val="003B4F"/>
+                </a:solidFill>
+                <a:latin typeface="Courier"/>
+              </a:rPr>
+              <a:t>(</a:t>
+            </a:r>
+            <a:r>
+              <a:rPr>
+                <a:solidFill>
+                  <a:srgbClr val="20794D"/>
+                </a:solidFill>
+                <a:latin typeface="Courier"/>
+              </a:rPr>
+              <a:t>"decimalLongitude"</a:t>
+            </a:r>
+            <a:r>
+              <a:rPr>
+                <a:solidFill>
+                  <a:srgbClr val="003B4F"/>
+                </a:solidFill>
+                <a:latin typeface="Courier"/>
+              </a:rPr>
+              <a:t>, </a:t>
+            </a:r>
+            <a:r>
+              <a:rPr>
+                <a:solidFill>
+                  <a:srgbClr val="20794D"/>
+                </a:solidFill>
+                <a:latin typeface="Courier"/>
+              </a:rPr>
+              <a:t>"decimalLatitude"</a:t>
+            </a:r>
+            <a:r>
+              <a:rPr>
+                <a:solidFill>
+                  <a:srgbClr val="003B4F"/>
+                </a:solidFill>
+                <a:latin typeface="Courier"/>
+              </a:rPr>
+              <a:t>), </a:t>
+            </a:r>
+            <a:r>
+              <a:rPr>
+                <a:solidFill>
+                  <a:srgbClr val="657422"/>
+                </a:solidFill>
+                <a:latin typeface="Courier"/>
+              </a:rPr>
+              <a:t>crs =</a:t>
+            </a:r>
+            <a:r>
+              <a:rPr>
+                <a:solidFill>
+                  <a:srgbClr val="003B4F"/>
+                </a:solidFill>
+                <a:latin typeface="Courier"/>
+              </a:rPr>
+              <a:t> </a:t>
+            </a:r>
+            <a:r>
+              <a:rPr>
+                <a:solidFill>
+                  <a:srgbClr val="AD0000"/>
+                </a:solidFill>
+                <a:latin typeface="Courier"/>
+              </a:rPr>
+              <a:t>4326</a:t>
+            </a:r>
+            <a:r>
+              <a:rPr>
+                <a:solidFill>
+                  <a:srgbClr val="003B4F"/>
+                </a:solidFill>
+                <a:latin typeface="Courier"/>
+              </a:rPr>
+              <a:t>)</a:t>
+            </a:r>
+            <a:br/>
+            <a:br/>
+            <a:r>
+              <a:rPr>
+                <a:solidFill>
+                  <a:srgbClr val="5E5E5E"/>
+                </a:solidFill>
+                <a:latin typeface="Courier"/>
+              </a:rPr>
+              <a:t># 3. points on the same states basemap you used in class</a:t>
+            </a:r>
+            <a:br/>
+            <a:r>
+              <a:rPr>
+                <a:solidFill>
+                  <a:srgbClr val="4758AB"/>
+                </a:solidFill>
+                <a:latin typeface="Courier"/>
+              </a:rPr>
+              <a:t>ggplot</a:t>
+            </a:r>
+            <a:r>
+              <a:rPr>
+                <a:solidFill>
+                  <a:srgbClr val="003B4F"/>
+                </a:solidFill>
+                <a:latin typeface="Courier"/>
+              </a:rPr>
+              <a:t>() </a:t>
+            </a:r>
+            <a:r>
+              <a:rPr>
+                <a:solidFill>
+                  <a:srgbClr val="5E5E5E"/>
+                </a:solidFill>
+                <a:latin typeface="Courier"/>
+              </a:rPr>
+              <a:t>+</a:t>
+            </a:r>
+            <a:br/>
+            <a:r>
+              <a:rPr>
+                <a:solidFill>
+                  <a:srgbClr val="003B4F"/>
+                </a:solidFill>
+                <a:latin typeface="Courier"/>
+              </a:rPr>
+              <a:t>  </a:t>
+            </a:r>
+            <a:r>
+              <a:rPr>
+                <a:solidFill>
+                  <a:srgbClr val="4758AB"/>
+                </a:solidFill>
+                <a:latin typeface="Courier"/>
+              </a:rPr>
+              <a:t>geom_sf</a:t>
+            </a:r>
+            <a:r>
+              <a:rPr>
+                <a:solidFill>
+                  <a:srgbClr val="003B4F"/>
+                </a:solidFill>
+                <a:latin typeface="Courier"/>
+              </a:rPr>
+              <a:t>(</a:t>
+            </a:r>
+            <a:r>
+              <a:rPr>
+                <a:solidFill>
+                  <a:srgbClr val="657422"/>
+                </a:solidFill>
+                <a:latin typeface="Courier"/>
+              </a:rPr>
+              <a:t>data =</a:t>
+            </a:r>
+            <a:r>
+              <a:rPr>
+                <a:solidFill>
+                  <a:srgbClr val="003B4F"/>
+                </a:solidFill>
+                <a:latin typeface="Courier"/>
+              </a:rPr>
+              <a:t> states_sf, </a:t>
+            </a:r>
+            <a:r>
+              <a:rPr>
+                <a:solidFill>
+                  <a:srgbClr val="657422"/>
+                </a:solidFill>
+                <a:latin typeface="Courier"/>
+              </a:rPr>
+              <a:t>fill =</a:t>
+            </a:r>
+            <a:r>
+              <a:rPr>
+                <a:solidFill>
+                  <a:srgbClr val="003B4F"/>
+                </a:solidFill>
+                <a:latin typeface="Courier"/>
+              </a:rPr>
+              <a:t> </a:t>
+            </a:r>
+            <a:r>
+              <a:rPr>
+                <a:solidFill>
+                  <a:srgbClr val="20794D"/>
+                </a:solidFill>
+                <a:latin typeface="Courier"/>
+              </a:rPr>
+              <a:t>"grey96"</a:t>
+            </a:r>
+            <a:r>
+              <a:rPr>
+                <a:solidFill>
+                  <a:srgbClr val="003B4F"/>
+                </a:solidFill>
+                <a:latin typeface="Courier"/>
+              </a:rPr>
+              <a:t>, </a:t>
+            </a:r>
+            <a:r>
+              <a:rPr>
+                <a:solidFill>
+                  <a:srgbClr val="657422"/>
+                </a:solidFill>
+                <a:latin typeface="Courier"/>
+              </a:rPr>
+              <a:t>color =</a:t>
+            </a:r>
+            <a:r>
+              <a:rPr>
+                <a:solidFill>
+                  <a:srgbClr val="003B4F"/>
+                </a:solidFill>
+                <a:latin typeface="Courier"/>
+              </a:rPr>
+              <a:t> </a:t>
+            </a:r>
+            <a:r>
+              <a:rPr>
+                <a:solidFill>
+                  <a:srgbClr val="20794D"/>
+                </a:solidFill>
+                <a:latin typeface="Courier"/>
+              </a:rPr>
+              <a:t>"grey80"</a:t>
+            </a:r>
+            <a:r>
+              <a:rPr>
+                <a:solidFill>
+                  <a:srgbClr val="003B4F"/>
+                </a:solidFill>
+                <a:latin typeface="Courier"/>
+              </a:rPr>
+              <a:t>) </a:t>
+            </a:r>
+            <a:r>
+              <a:rPr>
+                <a:solidFill>
+                  <a:srgbClr val="5E5E5E"/>
+                </a:solidFill>
+                <a:latin typeface="Courier"/>
+              </a:rPr>
+              <a:t>+</a:t>
+            </a:r>
+            <a:br/>
+            <a:r>
+              <a:rPr>
+                <a:solidFill>
+                  <a:srgbClr val="003B4F"/>
+                </a:solidFill>
+                <a:latin typeface="Courier"/>
+              </a:rPr>
+              <a:t>  </a:t>
+            </a:r>
+            <a:r>
+              <a:rPr>
+                <a:solidFill>
+                  <a:srgbClr val="4758AB"/>
+                </a:solidFill>
+                <a:latin typeface="Courier"/>
+              </a:rPr>
+              <a:t>geom_sf</a:t>
+            </a:r>
+            <a:r>
+              <a:rPr>
+                <a:solidFill>
+                  <a:srgbClr val="003B4F"/>
+                </a:solidFill>
+                <a:latin typeface="Courier"/>
+              </a:rPr>
+              <a:t>(</a:t>
+            </a:r>
+            <a:r>
+              <a:rPr>
+                <a:solidFill>
+                  <a:srgbClr val="657422"/>
+                </a:solidFill>
+                <a:latin typeface="Courier"/>
+              </a:rPr>
+              <a:t>data =</a:t>
+            </a:r>
+            <a:r>
+              <a:rPr>
+                <a:solidFill>
+                  <a:srgbClr val="003B4F"/>
+                </a:solidFill>
+                <a:latin typeface="Courier"/>
+              </a:rPr>
+              <a:t> sp_sf, </a:t>
+            </a:r>
+            <a:r>
+              <a:rPr>
+                <a:solidFill>
+                  <a:srgbClr val="657422"/>
+                </a:solidFill>
+                <a:latin typeface="Courier"/>
+              </a:rPr>
+              <a:t>alpha =</a:t>
+            </a:r>
+            <a:r>
+              <a:rPr>
+                <a:solidFill>
+                  <a:srgbClr val="003B4F"/>
+                </a:solidFill>
+                <a:latin typeface="Courier"/>
+              </a:rPr>
+              <a:t> </a:t>
+            </a:r>
+            <a:r>
+              <a:rPr>
+                <a:solidFill>
+                  <a:srgbClr val="AD0000"/>
+                </a:solidFill>
+                <a:latin typeface="Courier"/>
+              </a:rPr>
+              <a:t>0.3</a:t>
+            </a:r>
+            <a:r>
+              <a:rPr>
+                <a:solidFill>
+                  <a:srgbClr val="003B4F"/>
+                </a:solidFill>
+                <a:latin typeface="Courier"/>
+              </a:rPr>
+              <a:t>, </a:t>
+            </a:r>
+            <a:r>
+              <a:rPr>
+                <a:solidFill>
+                  <a:srgbClr val="657422"/>
+                </a:solidFill>
+                <a:latin typeface="Courier"/>
+              </a:rPr>
+              <a:t>size =</a:t>
+            </a:r>
+            <a:r>
+              <a:rPr>
+                <a:solidFill>
+                  <a:srgbClr val="003B4F"/>
+                </a:solidFill>
+                <a:latin typeface="Courier"/>
+              </a:rPr>
+              <a:t> </a:t>
+            </a:r>
+            <a:r>
+              <a:rPr>
+                <a:solidFill>
+                  <a:srgbClr val="AD0000"/>
+                </a:solidFill>
+                <a:latin typeface="Courier"/>
+              </a:rPr>
+              <a:t>0.6</a:t>
+            </a:r>
+            <a:r>
+              <a:rPr>
+                <a:solidFill>
+                  <a:srgbClr val="003B4F"/>
+                </a:solidFill>
+                <a:latin typeface="Courier"/>
+              </a:rPr>
+              <a:t>, </a:t>
+            </a:r>
+            <a:r>
+              <a:rPr>
+                <a:solidFill>
+                  <a:srgbClr val="657422"/>
+                </a:solidFill>
+                <a:latin typeface="Courier"/>
+              </a:rPr>
+              <a:t>color =</a:t>
+            </a:r>
+            <a:r>
+              <a:rPr>
+                <a:solidFill>
+                  <a:srgbClr val="003B4F"/>
+                </a:solidFill>
+                <a:latin typeface="Courier"/>
+              </a:rPr>
+              <a:t> </a:t>
+            </a:r>
+            <a:r>
+              <a:rPr>
+                <a:solidFill>
+                  <a:srgbClr val="20794D"/>
+                </a:solidFill>
+                <a:latin typeface="Courier"/>
+              </a:rPr>
+              <a:t>"darkgreen"</a:t>
+            </a:r>
+            <a:r>
+              <a:rPr>
+                <a:solidFill>
+                  <a:srgbClr val="003B4F"/>
+                </a:solidFill>
+                <a:latin typeface="Courier"/>
+              </a:rPr>
+              <a:t>) </a:t>
+            </a:r>
+            <a:r>
+              <a:rPr>
+                <a:solidFill>
+                  <a:srgbClr val="5E5E5E"/>
+                </a:solidFill>
+                <a:latin typeface="Courier"/>
+              </a:rPr>
+              <a:t>+</a:t>
+            </a:r>
+            <a:br/>
+            <a:r>
+              <a:rPr>
+                <a:solidFill>
+                  <a:srgbClr val="003B4F"/>
+                </a:solidFill>
+                <a:latin typeface="Courier"/>
+              </a:rPr>
+              <a:t>  </a:t>
+            </a:r>
+            <a:r>
+              <a:rPr>
+                <a:solidFill>
+                  <a:srgbClr val="4758AB"/>
+                </a:solidFill>
+                <a:latin typeface="Courier"/>
+              </a:rPr>
+              <a:t>coord_sf</a:t>
+            </a:r>
+            <a:r>
+              <a:rPr>
+                <a:solidFill>
+                  <a:srgbClr val="003B4F"/>
+                </a:solidFill>
+                <a:latin typeface="Courier"/>
+              </a:rPr>
+              <a:t>(</a:t>
+            </a:r>
+            <a:r>
+              <a:rPr>
+                <a:solidFill>
+                  <a:srgbClr val="657422"/>
+                </a:solidFill>
+                <a:latin typeface="Courier"/>
+              </a:rPr>
+              <a:t>crs =</a:t>
+            </a:r>
+            <a:r>
+              <a:rPr>
+                <a:solidFill>
+                  <a:srgbClr val="003B4F"/>
+                </a:solidFill>
+                <a:latin typeface="Courier"/>
+              </a:rPr>
+              <a:t> </a:t>
+            </a:r>
+            <a:r>
+              <a:rPr>
+                <a:solidFill>
+                  <a:srgbClr val="AD0000"/>
+                </a:solidFill>
+                <a:latin typeface="Courier"/>
+              </a:rPr>
+              <a:t>5070</a:t>
+            </a:r>
+            <a:r>
+              <a:rPr>
+                <a:solidFill>
+                  <a:srgbClr val="003B4F"/>
+                </a:solidFill>
+                <a:latin typeface="Courier"/>
+              </a:rPr>
+              <a:t>) </a:t>
+            </a:r>
+            <a:r>
+              <a:rPr>
+                <a:solidFill>
+                  <a:srgbClr val="5E5E5E"/>
+                </a:solidFill>
+                <a:latin typeface="Courier"/>
+              </a:rPr>
+              <a:t>+</a:t>
+            </a:r>
+            <a:br/>
+            <a:r>
+              <a:rPr>
+                <a:solidFill>
+                  <a:srgbClr val="003B4F"/>
+                </a:solidFill>
+                <a:latin typeface="Courier"/>
+              </a:rPr>
+              <a:t>  </a:t>
+            </a:r>
+            <a:r>
+              <a:rPr>
+                <a:solidFill>
+                  <a:srgbClr val="4758AB"/>
+                </a:solidFill>
+                <a:latin typeface="Courier"/>
+              </a:rPr>
+              <a:t>theme_void</a:t>
+            </a:r>
+            <a:r>
+              <a:rPr>
+                <a:solidFill>
+                  <a:srgbClr val="003B4F"/>
+                </a:solidFill>
+                <a:latin typeface="Courier"/>
+              </a:rPr>
+              <a:t>()</a:t>
+            </a:r>
+          </a:p>
+          <a:p>
+            <a:pPr lvl="0" indent="0" marL="0">
+              <a:buNone/>
+            </a:pPr>
+            <a:r>
+              <a:rPr/>
+              <a:t>Save the map to </a:t>
+            </a:r>
+            <a:r>
+              <a:rPr>
+                <a:latin typeface="Courier"/>
+              </a:rPr>
+              <a:t>figures/</a:t>
+            </a:r>
+            <a:r>
+              <a:rPr/>
+              <a:t> at </a:t>
+            </a:r>
+            <a:r>
+              <a:rPr>
+                <a:latin typeface="Courier"/>
+              </a:rPr>
+              <a:t>dpi = 300</a:t>
+            </a:r>
+            <a:r>
+              <a:rPr/>
+              <a:t>. Record your species and how many records you got.</a:t>
+            </a:r>
+          </a:p>
+          <a:p>
+            <a:pPr lvl="0" indent="0" marL="0">
+              <a:spcBef>
+                <a:spcPts val="3000"/>
+              </a:spcBef>
+              <a:buNone/>
+            </a:pPr>
+            <a:r>
+              <a:rPr b="1"/>
+              <a:t>E2 · Predict, then check — ✍️ by hand (3 pts)</a:t>
+            </a:r>
+          </a:p>
+          <a:p>
+            <a:pPr lvl="0" indent="0" marL="0">
+              <a:buNone/>
+            </a:pPr>
+            <a:r>
+              <a:rPr b="1"/>
+              <a:t>Before running E1:</a:t>
+            </a:r>
+            <a:r>
+              <a:rPr/>
+              <a:t> sketch, on a rough US outline, where you expect your species to occur and why (climate, habitat, range you know). Then run E1 and write 2–3 sentences comparing your prediction to the real map — and note whether anything looks like a </a:t>
+            </a:r>
+            <a:r>
+              <a:rPr i="1"/>
+              <a:t>sampling</a:t>
+            </a:r>
+            <a:r>
+              <a:rPr/>
+              <a:t> artifact rather than real range (a dense blob around one city, a hard line at a state border).</a:t>
+            </a:r>
+          </a:p>
+          <a:p>
+            <a:pPr lvl="0" indent="0" marL="0">
+              <a:spcBef>
+                <a:spcPts val="3000"/>
+              </a:spcBef>
+              <a:buNone/>
+            </a:pPr>
+            <a:r>
+              <a:rPr b="1"/>
+              <a:t>E3 · Explain it — ✍️ by hand (3 pts)</a:t>
+            </a:r>
+          </a:p>
+          <a:p>
             <a:pPr lvl="0" indent="-342900" marL="342900">
               <a:buAutoNum type="arabicPeriod"/>
             </a:pPr>
             <a:r>
-              <a:rPr b="1">
-                <a:latin typeface="Courier"/>
-              </a:rPr>
-              <a:t>st_as_sf</a:t>
-            </a:r>
-            <a:r>
-              <a:rPr b="1"/>
-              <a:t> error about missing coordinates</a:t>
-            </a:r>
-            <a:r>
               <a:rPr/>
-              <a:t> → filter out </a:t>
-            </a:r>
-            <a:r>
-              <a:rPr>
-                <a:latin typeface="Courier"/>
-              </a:rPr>
-              <a:t>NA</a:t>
+              <a:t>GBIF records are where people </a:t>
+            </a:r>
+            <a:r>
+              <a:rPr i="1"/>
+              <a:t>reported</a:t>
             </a:r>
             <a:r>
               <a:rPr/>
-              <a:t> lat/long first (Part 2).</a:t>
+              <a:t> the species, not where it truly lives. Give one concrete way that could bias </a:t>
+            </a:r>
+            <a:r>
+              <a:rPr i="1"/>
+              <a:t>your</a:t>
+            </a:r>
+            <a:r>
+              <a:rPr/>
+              <a:t> map.</a:t>
             </a:r>
           </a:p>
           <a:p>
@@ -8416,22 +9542,16 @@
               <a:buAutoNum type="arabicPeriod"/>
             </a:pPr>
             <a:r>
-              <a:rPr b="1"/>
-              <a:t>Points and states don’t line up</a:t>
-            </a:r>
-            <a:r>
               <a:rPr/>
-              <a:t> → both need the same CRS; set the states to </a:t>
-            </a:r>
-            <a:r>
-              <a:rPr>
-                <a:latin typeface="Courier"/>
-              </a:rPr>
-              <a:t>st_set_crs(4326)</a:t>
+              <a:t>Washington and California had many Bigfoot reports partly because they are big and populous. What extra data would make a state-to-state comparison of </a:t>
+            </a:r>
+            <a:r>
+              <a:rPr i="1"/>
+              <a:t>your</a:t>
             </a:r>
             <a:r>
               <a:rPr/>
-              <a:t>.</a:t>
+              <a:t> species fair?</a:t>
             </a:r>
           </a:p>
           <a:p>
@@ -8439,46 +9559,14 @@
               <a:buAutoNum type="arabicPeriod"/>
             </a:pPr>
             <a:r>
-              <a:rPr b="1"/>
-              <a:t>Whole choropleth is grey</a:t>
-            </a:r>
-            <a:r>
               <a:rPr/>
-              <a:t> → your join keys don’t match (case!). Lowercase both sides.</a:t>
-            </a:r>
-          </a:p>
-          <a:p>
-            <a:pPr lvl="0" indent="-342900" marL="342900">
-              <a:buAutoNum type="arabicPeriod"/>
-            </a:pPr>
-            <a:r>
-              <a:rPr b="1"/>
-              <a:t>Empty states in the choropleth</a:t>
-            </a:r>
-            <a:r>
-              <a:rPr/>
-              <a:t> → a state name spelled differently in the two tables; check with </a:t>
-            </a:r>
-            <a:r>
-              <a:rPr>
-                <a:latin typeface="Courier"/>
-              </a:rPr>
-              <a:t>anti_join()</a:t>
-            </a:r>
-            <a:r>
-              <a:rPr/>
-              <a:t>.</a:t>
-            </a:r>
-          </a:p>
-          <a:p>
-            <a:pPr lvl="0" indent="-342900" marL="342900">
-              <a:buAutoNum type="arabicPeriod"/>
-            </a:pPr>
-            <a:r>
-              <a:rPr b="1">
-                <a:latin typeface="Courier"/>
-              </a:rPr>
-              <a:t>could not find function "st_as_sf"</a:t>
+              <a:t>The choropleth recipe (polygons → counts → </a:t>
+            </a:r>
+            <a:r>
+              <a:rPr>
+                <a:latin typeface="Courier"/>
+              </a:rPr>
+              <a:t>left_join()</a:t>
             </a:r>
             <a:r>
               <a:rPr/>
@@ -8488,77 +9576,11 @@
               <a:rPr>
                 <a:latin typeface="Courier"/>
               </a:rPr>
-              <a:t>install.packages("sf")</a:t>
+              <a:t>geom_sf(fill=)</a:t>
             </a:r>
             <a:r>
               <a:rPr/>
-              <a:t>, then </a:t>
-            </a:r>
-            <a:r>
-              <a:rPr>
-                <a:latin typeface="Courier"/>
-              </a:rPr>
-              <a:t>library(sf)</a:t>
-            </a:r>
-            <a:r>
-              <a:rPr/>
-              <a:t>.</a:t>
-            </a:r>
-          </a:p>
-          <a:p>
-            <a:pPr lvl="0" indent="-342900" marL="342900">
-              <a:buAutoNum type="arabicPeriod"/>
-            </a:pPr>
-            <a:r>
-              <a:rPr b="1"/>
-              <a:t>Cheat sheet</a:t>
-            </a:r>
-            <a:r>
-              <a:rPr/>
-              <a:t> — </a:t>
-            </a:r>
-            <a:r>
-              <a:rPr>
-                <a:hlinkClick r:id="rId2"/>
-              </a:rPr>
-              <a:t>https://r-spatial.github.io/sf/</a:t>
-            </a:r>
-          </a:p>
-          <a:p>
-            <a:pPr lvl="0" indent="0" marL="1270000">
-              <a:buNone/>
-            </a:pPr>
-            <a:r>
-              <a:rPr sz="2000"/>
-              <a:t>💡 </a:t>
-            </a:r>
-            <a:r>
-              <a:rPr sz="2000" b="1"/>
-              <a:t>Key idea:</a:t>
-            </a:r>
-            <a:r>
-              <a:rPr sz="2000"/>
-              <a:t> the choropleth recipe doesn’t change with the dataset — get polygons, get counts, </a:t>
-            </a:r>
-            <a:r>
-              <a:rPr sz="2000">
-                <a:latin typeface="Courier"/>
-              </a:rPr>
-              <a:t>left_join()</a:t>
-            </a:r>
-            <a:r>
-              <a:rPr sz="2000"/>
-              <a:t> them on a matching key, then shade with </a:t>
-            </a:r>
-            <a:r>
-              <a:rPr sz="2000">
-                <a:latin typeface="Courier"/>
-              </a:rPr>
-              <a:t>geom_sf()</a:t>
-            </a:r>
-            <a:r>
-              <a:rPr sz="2000"/>
-              <a:t>. You just ran it on Bigfoot sightings; the homework runs the same four steps on a species from GBIF.</a:t>
+              <a:t>) didn’t change from Bigfoot to your species. In your own words, why is that recipe dataset-independent?</a:t>
             </a:r>
           </a:p>
         </p:txBody>
@@ -8569,6 +9591,253 @@
 </file>
 
 <file path=ppt/slides/slide22.xml><?xml version="1.0" encoding="utf-8"?>
+<p:sld xmlns:a="http://schemas.openxmlformats.org/drawingml/2006/main" xmlns:r="http://schemas.openxmlformats.org/officeDocument/2006/relationships" xmlns:p="http://schemas.openxmlformats.org/presentationml/2006/main">
+  <p:cSld>
+    <p:spTree>
+      <p:nvGrpSpPr>
+        <p:cNvPr id="1" name=""/>
+        <p:cNvGrpSpPr/>
+        <p:nvPr/>
+      </p:nvGrpSpPr>
+      <p:grpSpPr>
+        <a:xfrm>
+          <a:off x="0" y="0"/>
+          <a:ext cx="0" cy="0"/>
+          <a:chOff x="0" y="0"/>
+          <a:chExt cx="0" cy="0"/>
+        </a:xfrm>
+      </p:grpSpPr>
+      <p:sp>
+        <p:nvSpPr>
+          <p:cNvPr id="2" name="Title 1"/>
+          <p:cNvSpPr>
+            <a:spLocks noGrp="1"/>
+          </p:cNvSpPr>
+          <p:nvPr>
+            <p:ph type="title"/>
+          </p:nvPr>
+        </p:nvSpPr>
+        <p:spPr>
+          <a:xfrm>
+            <a:off x="0" y="0"/>
+            <a:ext cx="9144000" cy="582780"/>
+          </a:xfrm>
+        </p:spPr>
+        <p:txBody>
+          <a:bodyPr/>
+          <a:lstStyle/>
+          <a:p>
+            <a:pPr lvl="0" indent="0" marL="0">
+              <a:buNone/>
+            </a:pPr>
+            <a:r>
+              <a:rPr/>
+              <a:t>Getting unstuck</a:t>
+            </a:r>
+          </a:p>
+        </p:txBody>
+      </p:sp>
+      <p:sp>
+        <p:nvSpPr>
+          <p:cNvPr id="3" name="Content Placeholder 2"/>
+          <p:cNvSpPr>
+            <a:spLocks noGrp="1"/>
+          </p:cNvSpPr>
+          <p:nvPr>
+            <p:ph idx="1"/>
+          </p:nvPr>
+        </p:nvSpPr>
+        <p:spPr/>
+        <p:txBody>
+          <a:bodyPr/>
+          <a:lstStyle/>
+          <a:p>
+            <a:pPr lvl="0" indent="-342900" marL="342900">
+              <a:buAutoNum type="arabicPeriod"/>
+            </a:pPr>
+            <a:r>
+              <a:rPr b="1">
+                <a:latin typeface="Courier"/>
+              </a:rPr>
+              <a:t>st_as_sf</a:t>
+            </a:r>
+            <a:r>
+              <a:rPr b="1"/>
+              <a:t> error about missing coordinates</a:t>
+            </a:r>
+            <a:r>
+              <a:rPr/>
+              <a:t> → filter out </a:t>
+            </a:r>
+            <a:r>
+              <a:rPr>
+                <a:latin typeface="Courier"/>
+              </a:rPr>
+              <a:t>NA</a:t>
+            </a:r>
+            <a:r>
+              <a:rPr/>
+              <a:t> lat/long first (Part 2).</a:t>
+            </a:r>
+          </a:p>
+          <a:p>
+            <a:pPr lvl="0" indent="-342900" marL="342900">
+              <a:buAutoNum type="arabicPeriod"/>
+            </a:pPr>
+            <a:r>
+              <a:rPr b="1"/>
+              <a:t>Points and states don’t line up</a:t>
+            </a:r>
+            <a:r>
+              <a:rPr/>
+              <a:t> → both need the same CRS; set the states to </a:t>
+            </a:r>
+            <a:r>
+              <a:rPr>
+                <a:latin typeface="Courier"/>
+              </a:rPr>
+              <a:t>st_set_crs(4326)</a:t>
+            </a:r>
+            <a:r>
+              <a:rPr/>
+              <a:t>.</a:t>
+            </a:r>
+          </a:p>
+          <a:p>
+            <a:pPr lvl="0" indent="-342900" marL="342900">
+              <a:buAutoNum type="arabicPeriod"/>
+            </a:pPr>
+            <a:r>
+              <a:rPr b="1"/>
+              <a:t>Whole choropleth is grey</a:t>
+            </a:r>
+            <a:r>
+              <a:rPr/>
+              <a:t> → your join keys don’t match (case!). Lowercase both sides.</a:t>
+            </a:r>
+          </a:p>
+          <a:p>
+            <a:pPr lvl="0" indent="-342900" marL="342900">
+              <a:buAutoNum type="arabicPeriod"/>
+            </a:pPr>
+            <a:r>
+              <a:rPr b="1"/>
+              <a:t>Empty states in the choropleth</a:t>
+            </a:r>
+            <a:r>
+              <a:rPr/>
+              <a:t> → a state name spelled differently in the two tables; check with </a:t>
+            </a:r>
+            <a:r>
+              <a:rPr>
+                <a:latin typeface="Courier"/>
+              </a:rPr>
+              <a:t>anti_join()</a:t>
+            </a:r>
+            <a:r>
+              <a:rPr/>
+              <a:t>.</a:t>
+            </a:r>
+          </a:p>
+          <a:p>
+            <a:pPr lvl="0" indent="-342900" marL="342900">
+              <a:buAutoNum type="arabicPeriod"/>
+            </a:pPr>
+            <a:r>
+              <a:rPr b="1">
+                <a:latin typeface="Courier"/>
+              </a:rPr>
+              <a:t>could not find function "st_as_sf"</a:t>
+            </a:r>
+            <a:r>
+              <a:rPr/>
+              <a:t> → </a:t>
+            </a:r>
+            <a:r>
+              <a:rPr>
+                <a:latin typeface="Courier"/>
+              </a:rPr>
+              <a:t>install.packages("sf")</a:t>
+            </a:r>
+            <a:r>
+              <a:rPr/>
+              <a:t>, then </a:t>
+            </a:r>
+            <a:r>
+              <a:rPr>
+                <a:latin typeface="Courier"/>
+              </a:rPr>
+              <a:t>library(sf)</a:t>
+            </a:r>
+            <a:r>
+              <a:rPr/>
+              <a:t>.</a:t>
+            </a:r>
+          </a:p>
+          <a:p>
+            <a:pPr lvl="0" indent="-342900" marL="342900">
+              <a:buAutoNum type="arabicPeriod"/>
+            </a:pPr>
+            <a:r>
+              <a:rPr b="1"/>
+              <a:t>Cheat sheet</a:t>
+            </a:r>
+            <a:r>
+              <a:rPr/>
+              <a:t> — </a:t>
+            </a:r>
+            <a:r>
+              <a:rPr>
+                <a:hlinkClick r:id="rId2"/>
+              </a:rPr>
+              <a:t>https://r-spatial.github.io/sf/</a:t>
+            </a:r>
+          </a:p>
+          <a:p>
+            <a:pPr lvl="0" indent="0" marL="1270000">
+              <a:buNone/>
+            </a:pPr>
+            <a:r>
+              <a:rPr sz="2000"/>
+              <a:t>💡 </a:t>
+            </a:r>
+            <a:r>
+              <a:rPr sz="2000" b="1"/>
+              <a:t>Key idea:</a:t>
+            </a:r>
+            <a:r>
+              <a:rPr sz="2000"/>
+              <a:t> the choropleth recipe doesn’t change with the dataset — get polygons, get counts, </a:t>
+            </a:r>
+            <a:r>
+              <a:rPr sz="2000">
+                <a:latin typeface="Courier"/>
+              </a:rPr>
+              <a:t>left_join()</a:t>
+            </a:r>
+            <a:r>
+              <a:rPr sz="2000"/>
+              <a:t> them on a matching key, then shade with </a:t>
+            </a:r>
+            <a:r>
+              <a:rPr sz="2000">
+                <a:latin typeface="Courier"/>
+              </a:rPr>
+              <a:t>geom_sf()</a:t>
+            </a:r>
+            <a:r>
+              <a:rPr sz="2000"/>
+              <a:t>. You just ran it on Bigfoot sightings; the Extension runs the same four steps on a species you pick from GBIF.</a:t>
+            </a:r>
+          </a:p>
+        </p:txBody>
+      </p:sp>
+    </p:spTree>
+  </p:cSld>
+</p:sld>
+</file>
+
+<file path=ppt/slides/slide23.xml><?xml version="1.0" encoding="utf-8"?>
 <p:sld xmlns:a="http://schemas.openxmlformats.org/drawingml/2006/main" xmlns:r="http://schemas.openxmlformats.org/officeDocument/2006/relationships" xmlns:p="http://schemas.openxmlformats.org/presentationml/2006/main">
   <p:cSld>
     <p:spTree>
@@ -8605,17 +9874,7 @@
             </a:pPr>
             <a:r>
               <a:rPr i="1"/>
-              <a:t>End of Worksheet 13. Homework: map your own species from GBIF with </a:t>
-            </a:r>
-            <a:r>
-              <a:rPr i="1">
-                <a:latin typeface="Courier"/>
-              </a:rPr>
-              <a:t>rgbif</a:t>
-            </a:r>
-            <a:r>
-              <a:rPr i="1"/>
-              <a:t>.</a:t>
+              <a:t>End of the Mapping worksheet.</a:t>
             </a:r>
           </a:p>
         </p:txBody>
